--- a/material/Python/11_클래스기초_OOP.pptx
+++ b/material/Python/11_클래스기초_OOP.pptx
@@ -1,6 +1,6 @@
 
 <file path=ppt/presentation.xml><?xml version="1.0" encoding="utf-8"?>
-<p:presentation xmlns:a="http://schemas.openxmlformats.org/drawingml/2006/main" xmlns:r="http://schemas.openxmlformats.org/officeDocument/2006/relationships" xmlns:p="http://schemas.openxmlformats.org/presentationml/2006/main" saveSubsetFonts="1">
+<p:presentation xmlns:a="http://schemas.openxmlformats.org/drawingml/2006/main" xmlns:r="http://schemas.openxmlformats.org/officeDocument/2006/relationships" xmlns:p="http://schemas.openxmlformats.org/presentationml/2006/main" embedTrueTypeFonts="1" saveSubsetFonts="1">
   <p:sldMasterIdLst>
     <p:sldMasterId id="2147483660" r:id="rId1"/>
   </p:sldMasterIdLst>
@@ -27,6 +27,34 @@
   </p:sldIdLst>
   <p:sldSz cx="12192000" cy="6858000"/>
   <p:notesSz cx="6858000" cy="9144000"/>
+  <p:embeddedFontLst>
+    <p:embeddedFont>
+      <p:font typeface="G마켓 산스 TTF Bold" panose="02000000000000000000" pitchFamily="2" charset="-127"/>
+      <p:bold r:id="rId19"/>
+    </p:embeddedFont>
+    <p:embeddedFont>
+      <p:font typeface="Pretendard Black" panose="02000A03000000020004" pitchFamily="2" charset="-127"/>
+      <p:bold r:id="rId20"/>
+    </p:embeddedFont>
+    <p:embeddedFont>
+      <p:font typeface="Pretendard Light" panose="02000403000000020004" pitchFamily="2" charset="-127"/>
+      <p:regular r:id="rId21"/>
+    </p:embeddedFont>
+    <p:embeddedFont>
+      <p:font typeface="Pretendard Medium" panose="02000603000000020004" pitchFamily="2" charset="-127"/>
+      <p:regular r:id="rId22"/>
+    </p:embeddedFont>
+    <p:embeddedFont>
+      <p:font typeface="맑은 고딕" panose="020B0503020000020004" pitchFamily="50" charset="-127"/>
+      <p:regular r:id="rId23"/>
+      <p:bold r:id="rId24"/>
+    </p:embeddedFont>
+    <p:embeddedFont>
+      <p:font typeface="메이플스토리" panose="02000300000000000000" pitchFamily="2" charset="-127"/>
+      <p:regular r:id="rId25"/>
+      <p:bold r:id="rId26"/>
+    </p:embeddedFont>
+  </p:embeddedFontLst>
   <p:defaultTextStyle>
     <a:defPPr>
       <a:defRPr lang="ko-KR"/>
@@ -223,7 +251,7 @@
           <a:p>
             <a:fld id="{2229C11E-4EF0-425E-89BA-56B170901842}" type="datetimeFigureOut">
               <a:rPr lang="ko-KR" altLang="en-US" smtClean="0"/>
-              <a:t>2025-07-21</a:t>
+              <a:t>2025-08-21</a:t>
             </a:fld>
             <a:endParaRPr lang="ko-KR" altLang="en-US"/>
           </a:p>
@@ -722,7 +750,7 @@
           <a:p>
             <a:fld id="{9C6F2426-F011-4048-96E6-328581C59A1B}" type="datetimeFigureOut">
               <a:rPr lang="ko-KR" altLang="en-US" smtClean="0"/>
-              <a:t>2025-07-21</a:t>
+              <a:t>2025-08-21</a:t>
             </a:fld>
             <a:endParaRPr lang="ko-KR" altLang="en-US"/>
           </a:p>
@@ -1009,7 +1037,7 @@
           <a:p>
             <a:fld id="{9C6F2426-F011-4048-96E6-328581C59A1B}" type="datetimeFigureOut">
               <a:rPr lang="ko-KR" altLang="en-US" smtClean="0"/>
-              <a:t>2025-07-21</a:t>
+              <a:t>2025-08-21</a:t>
             </a:fld>
             <a:endParaRPr lang="ko-KR" altLang="en-US"/>
           </a:p>
@@ -1184,7 +1212,7 @@
           <a:p>
             <a:fld id="{9C6F2426-F011-4048-96E6-328581C59A1B}" type="datetimeFigureOut">
               <a:rPr lang="ko-KR" altLang="en-US" smtClean="0"/>
-              <a:t>2025-07-21</a:t>
+              <a:t>2025-08-21</a:t>
             </a:fld>
             <a:endParaRPr lang="ko-KR" altLang="en-US"/>
           </a:p>
@@ -1340,7 +1368,7 @@
           <a:p>
             <a:fld id="{9C6F2426-F011-4048-96E6-328581C59A1B}" type="datetimeFigureOut">
               <a:rPr lang="ko-KR" altLang="en-US" smtClean="0"/>
-              <a:t>2025-07-21</a:t>
+              <a:t>2025-08-21</a:t>
             </a:fld>
             <a:endParaRPr lang="ko-KR" altLang="en-US"/>
           </a:p>
@@ -1481,7 +1509,7 @@
           <a:p>
             <a:fld id="{9C6F2426-F011-4048-96E6-328581C59A1B}" type="datetimeFigureOut">
               <a:rPr lang="ko-KR" altLang="en-US" smtClean="0"/>
-              <a:t>2025-07-21</a:t>
+              <a:t>2025-08-21</a:t>
             </a:fld>
             <a:endParaRPr lang="ko-KR" altLang="en-US"/>
           </a:p>
@@ -1810,7 +1838,7 @@
           <a:p>
             <a:fld id="{9C6F2426-F011-4048-96E6-328581C59A1B}" type="datetimeFigureOut">
               <a:rPr lang="ko-KR" altLang="en-US" smtClean="0"/>
-              <a:t>2025-07-21</a:t>
+              <a:t>2025-08-21</a:t>
             </a:fld>
             <a:endParaRPr lang="ko-KR" altLang="en-US"/>
           </a:p>
